--- a/01-精益工具知识库/PPT/03-价值流图VSM详解.pptx
+++ b/01-精益工具知识库/PPT/03-价值流图VSM详解.pptx
@@ -1426,6 +1426,10 @@
             <a:prstDash val="solid"/>
           </a:ln>
         </p:spPr>
+        <p:txBody>
+          <a:bodyPr/>
+          <a:p/>
+        </p:txBody>
       </p:sp>
       <p:sp>
         <p:nvSpPr>
@@ -1451,6 +1455,10 @@
             <a:prstDash val="solid"/>
           </a:ln>
         </p:spPr>
+        <p:txBody>
+          <a:bodyPr/>
+          <a:p/>
+        </p:txBody>
       </p:sp>
       <p:sp>
         <p:nvSpPr>
@@ -1476,6 +1484,10 @@
             <a:prstDash val="solid"/>
           </a:ln>
         </p:spPr>
+        <p:txBody>
+          <a:bodyPr/>
+          <a:p/>
+        </p:txBody>
       </p:sp>
       <p:sp>
         <p:nvSpPr>
@@ -1501,6 +1513,10 @@
             <a:prstDash val="solid"/>
           </a:ln>
         </p:spPr>
+        <p:txBody>
+          <a:bodyPr/>
+          <a:p/>
+        </p:txBody>
       </p:sp>
       <p:sp>
         <p:nvSpPr>
@@ -1526,6 +1542,10 @@
             <a:prstDash val="solid"/>
           </a:ln>
         </p:spPr>
+        <p:txBody>
+          <a:bodyPr/>
+          <a:p/>
+        </p:txBody>
       </p:sp>
       <p:sp>
         <p:nvSpPr>
@@ -1668,6 +1688,10 @@
             <a:prstDash val="solid"/>
           </a:ln>
         </p:spPr>
+        <p:txBody>
+          <a:bodyPr/>
+          <a:p/>
+        </p:txBody>
       </p:sp>
       <p:sp>
         <p:nvSpPr>
@@ -1757,6 +1781,10 @@
             <a:prstDash val="solid"/>
           </a:ln>
         </p:spPr>
+        <p:txBody>
+          <a:bodyPr/>
+          <a:p/>
+        </p:txBody>
       </p:sp>
       <p:sp>
         <p:nvSpPr>
@@ -1782,6 +1810,10 @@
             <a:prstDash val="solid"/>
           </a:ln>
         </p:spPr>
+        <p:txBody>
+          <a:bodyPr/>
+          <a:p/>
+        </p:txBody>
       </p:sp>
       <p:sp>
         <p:nvSpPr>
@@ -1807,6 +1839,10 @@
             <a:prstDash val="solid"/>
           </a:ln>
         </p:spPr>
+        <p:txBody>
+          <a:bodyPr/>
+          <a:p/>
+        </p:txBody>
       </p:sp>
       <p:sp>
         <p:nvSpPr>
@@ -1907,6 +1943,10 @@
           </a:solidFill>
           <a:ln/>
         </p:spPr>
+        <p:txBody>
+          <a:bodyPr/>
+          <a:p/>
+        </p:txBody>
       </p:sp>
       <p:sp>
         <p:nvSpPr>
@@ -2014,6 +2054,10 @@
             </a:outerShdw>
           </a:effectLst>
         </p:spPr>
+        <p:txBody>
+          <a:bodyPr/>
+          <a:p/>
+        </p:txBody>
       </p:sp>
       <p:sp>
         <p:nvSpPr>
@@ -2039,6 +2083,10 @@
             <a:prstDash val="solid"/>
           </a:ln>
         </p:spPr>
+        <p:txBody>
+          <a:bodyPr/>
+          <a:p/>
+        </p:txBody>
       </p:sp>
       <p:sp>
         <p:nvSpPr>
@@ -2185,6 +2233,10 @@
             </a:outerShdw>
           </a:effectLst>
         </p:spPr>
+        <p:txBody>
+          <a:bodyPr/>
+          <a:p/>
+        </p:txBody>
       </p:sp>
       <p:sp>
         <p:nvSpPr>
@@ -2210,6 +2262,10 @@
             <a:prstDash val="solid"/>
           </a:ln>
         </p:spPr>
+        <p:txBody>
+          <a:bodyPr/>
+          <a:p/>
+        </p:txBody>
       </p:sp>
       <p:sp>
         <p:nvSpPr>
@@ -2356,6 +2412,10 @@
             </a:outerShdw>
           </a:effectLst>
         </p:spPr>
+        <p:txBody>
+          <a:bodyPr/>
+          <a:p/>
+        </p:txBody>
       </p:sp>
       <p:sp>
         <p:nvSpPr>
@@ -2381,6 +2441,10 @@
             <a:prstDash val="solid"/>
           </a:ln>
         </p:spPr>
+        <p:txBody>
+          <a:bodyPr/>
+          <a:p/>
+        </p:txBody>
       </p:sp>
       <p:sp>
         <p:nvSpPr>
@@ -2527,6 +2591,10 @@
             </a:outerShdw>
           </a:effectLst>
         </p:spPr>
+        <p:txBody>
+          <a:bodyPr/>
+          <a:p/>
+        </p:txBody>
       </p:sp>
       <p:sp>
         <p:nvSpPr>
@@ -2552,6 +2620,10 @@
             <a:prstDash val="solid"/>
           </a:ln>
         </p:spPr>
+        <p:txBody>
+          <a:bodyPr/>
+          <a:p/>
+        </p:txBody>
       </p:sp>
       <p:sp>
         <p:nvSpPr>
@@ -2698,6 +2770,10 @@
             </a:outerShdw>
           </a:effectLst>
         </p:spPr>
+        <p:txBody>
+          <a:bodyPr/>
+          <a:p/>
+        </p:txBody>
       </p:sp>
       <p:sp>
         <p:nvSpPr>
@@ -2723,6 +2799,10 @@
             <a:prstDash val="solid"/>
           </a:ln>
         </p:spPr>
+        <p:txBody>
+          <a:bodyPr/>
+          <a:p/>
+        </p:txBody>
       </p:sp>
       <p:sp>
         <p:nvSpPr>
@@ -2869,6 +2949,10 @@
             </a:outerShdw>
           </a:effectLst>
         </p:spPr>
+        <p:txBody>
+          <a:bodyPr/>
+          <a:p/>
+        </p:txBody>
       </p:sp>
       <p:sp>
         <p:nvSpPr>
@@ -2894,6 +2978,10 @@
             <a:prstDash val="solid"/>
           </a:ln>
         </p:spPr>
+        <p:txBody>
+          <a:bodyPr/>
+          <a:p/>
+        </p:txBody>
       </p:sp>
       <p:sp>
         <p:nvSpPr>
@@ -3036,6 +3124,10 @@
             <a:prstDash val="solid"/>
           </a:ln>
         </p:spPr>
+        <p:txBody>
+          <a:bodyPr/>
+          <a:p/>
+        </p:txBody>
       </p:sp>
       <p:sp>
         <p:nvSpPr>
@@ -3102,6 +3194,10 @@
             <a:prstDash val="solid"/>
           </a:ln>
         </p:spPr>
+        <p:txBody>
+          <a:bodyPr/>
+          <a:p/>
+        </p:txBody>
       </p:sp>
       <p:sp>
         <p:nvSpPr>
@@ -3168,6 +3264,10 @@
             <a:prstDash val="solid"/>
           </a:ln>
         </p:spPr>
+        <p:txBody>
+          <a:bodyPr/>
+          <a:p/>
+        </p:txBody>
       </p:sp>
       <p:sp>
         <p:nvSpPr>
@@ -3234,6 +3334,10 @@
             <a:prstDash val="solid"/>
           </a:ln>
         </p:spPr>
+        <p:txBody>
+          <a:bodyPr/>
+          <a:p/>
+        </p:txBody>
       </p:sp>
       <p:sp>
         <p:nvSpPr>
@@ -3300,6 +3404,10 @@
             <a:prstDash val="solid"/>
           </a:ln>
         </p:spPr>
+        <p:txBody>
+          <a:bodyPr/>
+          <a:p/>
+        </p:txBody>
       </p:sp>
       <p:sp>
         <p:nvSpPr>
@@ -3366,6 +3474,10 @@
             <a:prstDash val="solid"/>
           </a:ln>
         </p:spPr>
+        <p:txBody>
+          <a:bodyPr/>
+          <a:p/>
+        </p:txBody>
       </p:sp>
       <p:sp>
         <p:nvSpPr>
@@ -3430,6 +3542,10 @@
             <a:prstDash val="solid"/>
           </a:ln>
         </p:spPr>
+        <p:txBody>
+          <a:bodyPr/>
+          <a:p/>
+        </p:txBody>
       </p:sp>
       <p:sp>
         <p:nvSpPr>
@@ -3519,6 +3635,10 @@
             <a:prstDash val="solid"/>
           </a:ln>
         </p:spPr>
+        <p:txBody>
+          <a:bodyPr/>
+          <a:p/>
+        </p:txBody>
       </p:sp>
       <p:sp>
         <p:nvSpPr>
@@ -3544,6 +3664,10 @@
             <a:prstDash val="solid"/>
           </a:ln>
         </p:spPr>
+        <p:txBody>
+          <a:bodyPr/>
+          <a:p/>
+        </p:txBody>
       </p:sp>
       <p:sp>
         <p:nvSpPr>
@@ -3569,6 +3693,10 @@
             <a:prstDash val="solid"/>
           </a:ln>
         </p:spPr>
+        <p:txBody>
+          <a:bodyPr/>
+          <a:p/>
+        </p:txBody>
       </p:sp>
       <p:sp>
         <p:nvSpPr>
@@ -3669,6 +3797,10 @@
           </a:solidFill>
           <a:ln/>
         </p:spPr>
+        <p:txBody>
+          <a:bodyPr/>
+          <a:p/>
+        </p:txBody>
       </p:sp>
       <p:sp>
         <p:nvSpPr>
@@ -3789,6 +3921,10 @@
             <a:prstDash val="solid"/>
           </a:ln>
         </p:spPr>
+        <p:txBody>
+          <a:bodyPr/>
+          <a:p/>
+        </p:txBody>
       </p:sp>
       <p:sp>
         <p:nvSpPr>
@@ -3814,6 +3950,10 @@
             <a:prstDash val="solid"/>
           </a:ln>
         </p:spPr>
+        <p:txBody>
+          <a:bodyPr/>
+          <a:p/>
+        </p:txBody>
       </p:sp>
       <p:sp>
         <p:nvSpPr>
@@ -3892,6 +4032,10 @@
           </a:solidFill>
           <a:ln/>
         </p:spPr>
+        <p:txBody>
+          <a:bodyPr/>
+          <a:p/>
+        </p:txBody>
       </p:sp>
       <p:sp>
         <p:nvSpPr>
@@ -4012,6 +4156,10 @@
             <a:prstDash val="solid"/>
           </a:ln>
         </p:spPr>
+        <p:txBody>
+          <a:bodyPr/>
+          <a:p/>
+        </p:txBody>
       </p:sp>
       <p:sp>
         <p:nvSpPr>
@@ -4037,6 +4185,10 @@
             <a:prstDash val="solid"/>
           </a:ln>
         </p:spPr>
+        <p:txBody>
+          <a:bodyPr/>
+          <a:p/>
+        </p:txBody>
       </p:sp>
       <p:sp>
         <p:nvSpPr>
@@ -4115,6 +4267,10 @@
           </a:solidFill>
           <a:ln/>
         </p:spPr>
+        <p:txBody>
+          <a:bodyPr/>
+          <a:p/>
+        </p:txBody>
       </p:sp>
       <p:sp>
         <p:nvSpPr>
@@ -4235,6 +4391,10 @@
             <a:prstDash val="solid"/>
           </a:ln>
         </p:spPr>
+        <p:txBody>
+          <a:bodyPr/>
+          <a:p/>
+        </p:txBody>
       </p:sp>
       <p:sp>
         <p:nvSpPr>
@@ -4260,6 +4420,10 @@
             <a:prstDash val="solid"/>
           </a:ln>
         </p:spPr>
+        <p:txBody>
+          <a:bodyPr/>
+          <a:p/>
+        </p:txBody>
       </p:sp>
       <p:sp>
         <p:nvSpPr>
@@ -4338,6 +4502,10 @@
           </a:solidFill>
           <a:ln/>
         </p:spPr>
+        <p:txBody>
+          <a:bodyPr/>
+          <a:p/>
+        </p:txBody>
       </p:sp>
       <p:sp>
         <p:nvSpPr>
@@ -4458,6 +4626,10 @@
             <a:prstDash val="solid"/>
           </a:ln>
         </p:spPr>
+        <p:txBody>
+          <a:bodyPr/>
+          <a:p/>
+        </p:txBody>
       </p:sp>
       <p:sp>
         <p:nvSpPr>
@@ -4483,6 +4655,10 @@
             <a:prstDash val="solid"/>
           </a:ln>
         </p:spPr>
+        <p:txBody>
+          <a:bodyPr/>
+          <a:p/>
+        </p:txBody>
       </p:sp>
       <p:sp>
         <p:nvSpPr>
@@ -4561,6 +4737,10 @@
           </a:solidFill>
           <a:ln/>
         </p:spPr>
+        <p:txBody>
+          <a:bodyPr/>
+          <a:p/>
+        </p:txBody>
       </p:sp>
       <p:sp>
         <p:nvSpPr>
@@ -4681,6 +4861,10 @@
             <a:prstDash val="solid"/>
           </a:ln>
         </p:spPr>
+        <p:txBody>
+          <a:bodyPr/>
+          <a:p/>
+        </p:txBody>
       </p:sp>
       <p:sp>
         <p:nvSpPr>
@@ -4706,6 +4890,10 @@
             <a:prstDash val="solid"/>
           </a:ln>
         </p:spPr>
+        <p:txBody>
+          <a:bodyPr/>
+          <a:p/>
+        </p:txBody>
       </p:sp>
       <p:sp>
         <p:nvSpPr>
@@ -4784,6 +4972,10 @@
           </a:solidFill>
           <a:ln/>
         </p:spPr>
+        <p:txBody>
+          <a:bodyPr/>
+          <a:p/>
+        </p:txBody>
       </p:sp>
       <p:sp>
         <p:nvSpPr>
@@ -4904,6 +5096,10 @@
             <a:prstDash val="solid"/>
           </a:ln>
         </p:spPr>
+        <p:txBody>
+          <a:bodyPr/>
+          <a:p/>
+        </p:txBody>
       </p:sp>
       <p:sp>
         <p:nvSpPr>
@@ -4929,6 +5125,10 @@
             <a:prstDash val="solid"/>
           </a:ln>
         </p:spPr>
+        <p:txBody>
+          <a:bodyPr/>
+          <a:p/>
+        </p:txBody>
       </p:sp>
       <p:sp>
         <p:nvSpPr>
@@ -5007,6 +5207,10 @@
           </a:solidFill>
           <a:ln/>
         </p:spPr>
+        <p:txBody>
+          <a:bodyPr/>
+          <a:p/>
+        </p:txBody>
       </p:sp>
       <p:sp>
         <p:nvSpPr>
@@ -5180,6 +5384,10 @@
           </a:solidFill>
           <a:ln/>
         </p:spPr>
+        <p:txBody>
+          <a:bodyPr/>
+          <a:p/>
+        </p:txBody>
       </p:sp>
       <p:sp>
         <p:nvSpPr>
@@ -5248,6 +5456,10 @@
             </a:outerShdw>
           </a:effectLst>
         </p:spPr>
+        <p:txBody>
+          <a:bodyPr/>
+          <a:p/>
+        </p:txBody>
       </p:sp>
       <p:sp>
         <p:nvSpPr>
@@ -5273,6 +5485,10 @@
             <a:prstDash val="solid"/>
           </a:ln>
         </p:spPr>
+        <p:txBody>
+          <a:bodyPr/>
+          <a:p/>
+        </p:txBody>
       </p:sp>
       <p:sp>
         <p:nvSpPr>
@@ -5536,6 +5752,10 @@
             </a:outerShdw>
           </a:effectLst>
         </p:spPr>
+        <p:txBody>
+          <a:bodyPr/>
+          <a:p/>
+        </p:txBody>
       </p:sp>
       <p:sp>
         <p:nvSpPr>
@@ -5561,6 +5781,10 @@
             <a:prstDash val="solid"/>
           </a:ln>
         </p:spPr>
+        <p:txBody>
+          <a:bodyPr/>
+          <a:p/>
+        </p:txBody>
       </p:sp>
       <p:sp>
         <p:nvSpPr>
@@ -5820,6 +6044,10 @@
             <a:prstDash val="solid"/>
           </a:ln>
         </p:spPr>
+        <p:txBody>
+          <a:bodyPr/>
+          <a:p/>
+        </p:txBody>
       </p:sp>
       <p:sp>
         <p:nvSpPr>
@@ -5909,6 +6137,10 @@
             <a:prstDash val="solid"/>
           </a:ln>
         </p:spPr>
+        <p:txBody>
+          <a:bodyPr/>
+          <a:p/>
+        </p:txBody>
       </p:sp>
       <p:sp>
         <p:nvSpPr>
@@ -5934,6 +6166,10 @@
             <a:prstDash val="solid"/>
           </a:ln>
         </p:spPr>
+        <p:txBody>
+          <a:bodyPr/>
+          <a:p/>
+        </p:txBody>
       </p:sp>
       <p:sp>
         <p:nvSpPr>
@@ -5959,6 +6195,10 @@
             <a:prstDash val="solid"/>
           </a:ln>
         </p:spPr>
+        <p:txBody>
+          <a:bodyPr/>
+          <a:p/>
+        </p:txBody>
       </p:sp>
       <p:sp>
         <p:nvSpPr>
@@ -6071,7 +6311,7 @@
                 <a:ea typeface="Arial Black" pitchFamily="34" charset="-122"/>
                 <a:cs typeface="Arial Black" pitchFamily="34" charset="-120"/>
               </a:rPr>
-              <a:t>当前状态图绘制要素 — 以紧固件生产为例</a:t>
+              <a:t>当前状态图绘制要素 — 以产品生产为例</a:t>
             </a:r>
             <a:endParaRPr lang="en-US" sz="1600" dirty="0"/>
           </a:p>
@@ -6101,6 +6341,10 @@
             <a:prstDash val="solid"/>
           </a:ln>
         </p:spPr>
+        <p:txBody>
+          <a:bodyPr/>
+          <a:p/>
+        </p:txBody>
       </p:sp>
       <p:sp>
         <p:nvSpPr>
@@ -6135,7 +6379,7 @@
                 <a:ea typeface="Arial Black" pitchFamily="34" charset="-122"/>
                 <a:cs typeface="Arial Black" pitchFamily="34" charset="-120"/>
               </a:rPr>
-              <a:t>冷镦</a:t>
+              <a:t>机加工</a:t>
             </a:r>
             <a:endParaRPr lang="en-US" sz="1000" dirty="0"/>
           </a:p>
@@ -6152,7 +6396,7 @@
                 <a:ea typeface="Arial Black" pitchFamily="34" charset="-122"/>
                 <a:cs typeface="Arial Black" pitchFamily="34" charset="-120"/>
               </a:rPr>
-              <a:t>Cold Forging</a:t>
+              <a:t>Machining</a:t>
             </a:r>
             <a:endParaRPr lang="en-US" sz="1000" dirty="0"/>
           </a:p>
@@ -6182,6 +6426,10 @@
             <a:prstDash val="solid"/>
           </a:ln>
         </p:spPr>
+        <p:txBody>
+          <a:bodyPr/>
+          <a:p/>
+        </p:txBody>
       </p:sp>
       <p:sp>
         <p:nvSpPr>
@@ -6324,6 +6572,10 @@
             <a:prstDash val="solid"/>
           </a:ln>
         </p:spPr>
+        <p:txBody>
+          <a:bodyPr/>
+          <a:p/>
+        </p:txBody>
       </p:sp>
       <p:sp>
         <p:nvSpPr>
@@ -6388,6 +6640,10 @@
             <a:prstDash val="solid"/>
           </a:ln>
         </p:spPr>
+        <p:txBody>
+          <a:bodyPr/>
+          <a:p/>
+        </p:txBody>
       </p:sp>
       <p:sp>
         <p:nvSpPr>
@@ -6452,6 +6708,10 @@
             <a:prstDash val="solid"/>
           </a:ln>
         </p:spPr>
+        <p:txBody>
+          <a:bodyPr/>
+          <a:p/>
+        </p:txBody>
       </p:sp>
       <p:sp>
         <p:nvSpPr>
@@ -6486,7 +6746,7 @@
                 <a:ea typeface="Arial Black" pitchFamily="34" charset="-122"/>
                 <a:cs typeface="Arial Black" pitchFamily="34" charset="-120"/>
               </a:rPr>
-              <a:t>搓丝</a:t>
+              <a:t>精加工</a:t>
             </a:r>
             <a:endParaRPr lang="en-US" sz="1000" dirty="0"/>
           </a:p>
@@ -6503,7 +6763,7 @@
                 <a:ea typeface="Arial Black" pitchFamily="34" charset="-122"/>
                 <a:cs typeface="Arial Black" pitchFamily="34" charset="-120"/>
               </a:rPr>
-              <a:t>Thread Roll</a:t>
+              <a:t>Precision Machining</a:t>
             </a:r>
             <a:endParaRPr lang="en-US" sz="1000" dirty="0"/>
           </a:p>
@@ -6533,6 +6793,10 @@
             <a:prstDash val="solid"/>
           </a:ln>
         </p:spPr>
+        <p:txBody>
+          <a:bodyPr/>
+          <a:p/>
+        </p:txBody>
       </p:sp>
       <p:sp>
         <p:nvSpPr>
@@ -6675,6 +6939,10 @@
             <a:prstDash val="solid"/>
           </a:ln>
         </p:spPr>
+        <p:txBody>
+          <a:bodyPr/>
+          <a:p/>
+        </p:txBody>
       </p:sp>
       <p:sp>
         <p:nvSpPr>
@@ -6739,6 +7007,10 @@
             <a:prstDash val="solid"/>
           </a:ln>
         </p:spPr>
+        <p:txBody>
+          <a:bodyPr/>
+          <a:p/>
+        </p:txBody>
       </p:sp>
       <p:sp>
         <p:nvSpPr>
@@ -6803,6 +7075,10 @@
             <a:prstDash val="solid"/>
           </a:ln>
         </p:spPr>
+        <p:txBody>
+          <a:bodyPr/>
+          <a:p/>
+        </p:txBody>
       </p:sp>
       <p:sp>
         <p:nvSpPr>
@@ -6884,6 +7160,10 @@
             <a:prstDash val="solid"/>
           </a:ln>
         </p:spPr>
+        <p:txBody>
+          <a:bodyPr/>
+          <a:p/>
+        </p:txBody>
       </p:sp>
       <p:sp>
         <p:nvSpPr>
@@ -7026,6 +7306,10 @@
             <a:prstDash val="solid"/>
           </a:ln>
         </p:spPr>
+        <p:txBody>
+          <a:bodyPr/>
+          <a:p/>
+        </p:txBody>
       </p:sp>
       <p:sp>
         <p:nvSpPr>
@@ -7090,6 +7374,10 @@
             <a:prstDash val="solid"/>
           </a:ln>
         </p:spPr>
+        <p:txBody>
+          <a:bodyPr/>
+          <a:p/>
+        </p:txBody>
       </p:sp>
       <p:sp>
         <p:nvSpPr>
@@ -7154,6 +7442,10 @@
             <a:prstDash val="solid"/>
           </a:ln>
         </p:spPr>
+        <p:txBody>
+          <a:bodyPr/>
+          <a:p/>
+        </p:txBody>
       </p:sp>
       <p:sp>
         <p:nvSpPr>
@@ -7235,6 +7527,10 @@
             <a:prstDash val="solid"/>
           </a:ln>
         </p:spPr>
+        <p:txBody>
+          <a:bodyPr/>
+          <a:p/>
+        </p:txBody>
       </p:sp>
       <p:sp>
         <p:nvSpPr>
@@ -7377,6 +7673,10 @@
             <a:prstDash val="solid"/>
           </a:ln>
         </p:spPr>
+        <p:txBody>
+          <a:bodyPr/>
+          <a:p/>
+        </p:txBody>
       </p:sp>
       <p:sp>
         <p:nvSpPr>
@@ -7441,6 +7741,10 @@
             <a:prstDash val="solid"/>
           </a:ln>
         </p:spPr>
+        <p:txBody>
+          <a:bodyPr/>
+          <a:p/>
+        </p:txBody>
       </p:sp>
       <p:sp>
         <p:nvSpPr>
@@ -7505,6 +7809,10 @@
             <a:prstDash val="solid"/>
           </a:ln>
         </p:spPr>
+        <p:txBody>
+          <a:bodyPr/>
+          <a:p/>
+        </p:txBody>
       </p:sp>
       <p:sp>
         <p:nvSpPr>
@@ -7539,7 +7847,7 @@
                 <a:ea typeface="Arial Black" pitchFamily="34" charset="-122"/>
                 <a:cs typeface="Arial Black" pitchFamily="34" charset="-120"/>
               </a:rPr>
-              <a:t>分选</a:t>
+              <a:t>装配</a:t>
             </a:r>
             <a:endParaRPr lang="en-US" sz="1000" dirty="0"/>
           </a:p>
@@ -7586,6 +7894,10 @@
             <a:prstDash val="solid"/>
           </a:ln>
         </p:spPr>
+        <p:txBody>
+          <a:bodyPr/>
+          <a:p/>
+        </p:txBody>
       </p:sp>
       <p:sp>
         <p:nvSpPr>
@@ -7728,6 +8040,10 @@
             <a:prstDash val="solid"/>
           </a:ln>
         </p:spPr>
+        <p:txBody>
+          <a:bodyPr/>
+          <a:p/>
+        </p:txBody>
       </p:sp>
       <p:sp>
         <p:nvSpPr>
@@ -7792,6 +8108,10 @@
             <a:prstDash val="solid"/>
           </a:ln>
         </p:spPr>
+        <p:txBody>
+          <a:bodyPr/>
+          <a:p/>
+        </p:txBody>
       </p:sp>
       <p:sp>
         <p:nvSpPr>
@@ -7856,6 +8176,10 @@
             <a:prstDash val="solid"/>
           </a:ln>
         </p:spPr>
+        <p:txBody>
+          <a:bodyPr/>
+          <a:p/>
+        </p:txBody>
       </p:sp>
       <p:sp>
         <p:nvSpPr>
@@ -7937,6 +8261,10 @@
             <a:prstDash val="solid"/>
           </a:ln>
         </p:spPr>
+        <p:txBody>
+          <a:bodyPr/>
+          <a:p/>
+        </p:txBody>
       </p:sp>
       <p:sp>
         <p:nvSpPr>
@@ -8079,6 +8407,10 @@
             <a:prstDash val="solid"/>
           </a:ln>
         </p:spPr>
+        <p:txBody>
+          <a:bodyPr/>
+          <a:p/>
+        </p:txBody>
       </p:sp>
       <p:sp>
         <p:nvSpPr>
@@ -8147,6 +8479,10 @@
             </a:outerShdw>
           </a:effectLst>
         </p:spPr>
+        <p:txBody>
+          <a:bodyPr/>
+          <a:p/>
+        </p:txBody>
       </p:sp>
       <p:sp>
         <p:nvSpPr>
@@ -8172,6 +8508,10 @@
             <a:prstDash val="solid"/>
           </a:ln>
         </p:spPr>
+        <p:txBody>
+          <a:bodyPr/>
+          <a:p/>
+        </p:txBody>
       </p:sp>
       <p:sp>
         <p:nvSpPr>
@@ -8313,6 +8653,10 @@
             </a:outerShdw>
           </a:effectLst>
         </p:spPr>
+        <p:txBody>
+          <a:bodyPr/>
+          <a:p/>
+        </p:txBody>
       </p:sp>
       <p:sp>
         <p:nvSpPr>
@@ -8338,6 +8682,10 @@
             <a:prstDash val="solid"/>
           </a:ln>
         </p:spPr>
+        <p:txBody>
+          <a:bodyPr/>
+          <a:p/>
+        </p:txBody>
       </p:sp>
       <p:sp>
         <p:nvSpPr>
@@ -8479,6 +8827,10 @@
             </a:outerShdw>
           </a:effectLst>
         </p:spPr>
+        <p:txBody>
+          <a:bodyPr/>
+          <a:p/>
+        </p:txBody>
       </p:sp>
       <p:sp>
         <p:nvSpPr>
@@ -8504,6 +8856,10 @@
             <a:prstDash val="solid"/>
           </a:ln>
         </p:spPr>
+        <p:txBody>
+          <a:bodyPr/>
+          <a:p/>
+        </p:txBody>
       </p:sp>
       <p:sp>
         <p:nvSpPr>
@@ -8645,6 +9001,10 @@
             </a:outerShdw>
           </a:effectLst>
         </p:spPr>
+        <p:txBody>
+          <a:bodyPr/>
+          <a:p/>
+        </p:txBody>
       </p:sp>
       <p:sp>
         <p:nvSpPr>
@@ -8670,6 +9030,10 @@
             <a:prstDash val="solid"/>
           </a:ln>
         </p:spPr>
+        <p:txBody>
+          <a:bodyPr/>
+          <a:p/>
+        </p:txBody>
       </p:sp>
       <p:sp>
         <p:nvSpPr>
@@ -8807,6 +9171,10 @@
             <a:prstDash val="solid"/>
           </a:ln>
         </p:spPr>
+        <p:txBody>
+          <a:bodyPr/>
+          <a:p/>
+        </p:txBody>
       </p:sp>
       <p:sp>
         <p:nvSpPr>
@@ -8896,6 +9264,10 @@
             <a:prstDash val="solid"/>
           </a:ln>
         </p:spPr>
+        <p:txBody>
+          <a:bodyPr/>
+          <a:p/>
+        </p:txBody>
       </p:sp>
       <p:sp>
         <p:nvSpPr>
@@ -8921,6 +9293,10 @@
             <a:prstDash val="solid"/>
           </a:ln>
         </p:spPr>
+        <p:txBody>
+          <a:bodyPr/>
+          <a:p/>
+        </p:txBody>
       </p:sp>
       <p:sp>
         <p:nvSpPr>
@@ -8946,6 +9322,10 @@
             <a:prstDash val="solid"/>
           </a:ln>
         </p:spPr>
+        <p:txBody>
+          <a:bodyPr/>
+          <a:p/>
+        </p:txBody>
       </p:sp>
       <p:sp>
         <p:nvSpPr>
@@ -9092,6 +9472,10 @@
             </a:outerShdw>
           </a:effectLst>
         </p:spPr>
+        <p:txBody>
+          <a:bodyPr/>
+          <a:p/>
+        </p:txBody>
       </p:sp>
       <p:sp>
         <p:nvSpPr>
@@ -9117,6 +9501,10 @@
             <a:prstDash val="solid"/>
           </a:ln>
         </p:spPr>
+        <p:txBody>
+          <a:bodyPr/>
+          <a:p/>
+        </p:txBody>
       </p:sp>
       <p:sp>
         <p:nvSpPr>
@@ -9234,6 +9622,10 @@
           </a:solidFill>
           <a:ln/>
         </p:spPr>
+        <p:txBody>
+          <a:bodyPr/>
+          <a:p/>
+        </p:txBody>
       </p:sp>
       <p:sp>
         <p:nvSpPr>
@@ -9298,6 +9690,10 @@
             <a:prstDash val="solid"/>
           </a:ln>
         </p:spPr>
+        <p:txBody>
+          <a:bodyPr/>
+          <a:p/>
+        </p:txBody>
       </p:sp>
       <p:sp>
         <p:nvSpPr>
@@ -9320,6 +9716,10 @@
           </a:solidFill>
           <a:ln/>
         </p:spPr>
+        <p:txBody>
+          <a:bodyPr/>
+          <a:p/>
+        </p:txBody>
       </p:sp>
       <p:sp>
         <p:nvSpPr>
@@ -9388,6 +9788,10 @@
             </a:outerShdw>
           </a:effectLst>
         </p:spPr>
+        <p:txBody>
+          <a:bodyPr/>
+          <a:p/>
+        </p:txBody>
       </p:sp>
       <p:sp>
         <p:nvSpPr>
@@ -9413,6 +9817,10 @@
             <a:prstDash val="solid"/>
           </a:ln>
         </p:spPr>
+        <p:txBody>
+          <a:bodyPr/>
+          <a:p/>
+        </p:txBody>
       </p:sp>
       <p:sp>
         <p:nvSpPr>
@@ -9530,6 +9938,10 @@
           </a:solidFill>
           <a:ln/>
         </p:spPr>
+        <p:txBody>
+          <a:bodyPr/>
+          <a:p/>
+        </p:txBody>
       </p:sp>
       <p:sp>
         <p:nvSpPr>
@@ -9594,6 +10006,10 @@
             <a:prstDash val="solid"/>
           </a:ln>
         </p:spPr>
+        <p:txBody>
+          <a:bodyPr/>
+          <a:p/>
+        </p:txBody>
       </p:sp>
       <p:sp>
         <p:nvSpPr>
@@ -9616,6 +10032,10 @@
           </a:solidFill>
           <a:ln/>
         </p:spPr>
+        <p:txBody>
+          <a:bodyPr/>
+          <a:p/>
+        </p:txBody>
       </p:sp>
       <p:sp>
         <p:nvSpPr>
@@ -9684,6 +10104,10 @@
             </a:outerShdw>
           </a:effectLst>
         </p:spPr>
+        <p:txBody>
+          <a:bodyPr/>
+          <a:p/>
+        </p:txBody>
       </p:sp>
       <p:sp>
         <p:nvSpPr>
@@ -9709,6 +10133,10 @@
             <a:prstDash val="solid"/>
           </a:ln>
         </p:spPr>
+        <p:txBody>
+          <a:bodyPr/>
+          <a:p/>
+        </p:txBody>
       </p:sp>
       <p:sp>
         <p:nvSpPr>
@@ -9826,6 +10254,10 @@
           </a:solidFill>
           <a:ln/>
         </p:spPr>
+        <p:txBody>
+          <a:bodyPr/>
+          <a:p/>
+        </p:txBody>
       </p:sp>
       <p:sp>
         <p:nvSpPr>
@@ -9890,6 +10322,10 @@
             <a:prstDash val="solid"/>
           </a:ln>
         </p:spPr>
+        <p:txBody>
+          <a:bodyPr/>
+          <a:p/>
+        </p:txBody>
       </p:sp>
       <p:sp>
         <p:nvSpPr>
@@ -9912,6 +10348,10 @@
           </a:solidFill>
           <a:ln/>
         </p:spPr>
+        <p:txBody>
+          <a:bodyPr/>
+          <a:p/>
+        </p:txBody>
       </p:sp>
       <p:sp>
         <p:nvSpPr>
@@ -9980,6 +10420,10 @@
             </a:outerShdw>
           </a:effectLst>
         </p:spPr>
+        <p:txBody>
+          <a:bodyPr/>
+          <a:p/>
+        </p:txBody>
       </p:sp>
       <p:sp>
         <p:nvSpPr>
@@ -10005,6 +10449,10 @@
             <a:prstDash val="solid"/>
           </a:ln>
         </p:spPr>
+        <p:txBody>
+          <a:bodyPr/>
+          <a:p/>
+        </p:txBody>
       </p:sp>
       <p:sp>
         <p:nvSpPr>
@@ -10122,6 +10570,10 @@
           </a:solidFill>
           <a:ln/>
         </p:spPr>
+        <p:txBody>
+          <a:bodyPr/>
+          <a:p/>
+        </p:txBody>
       </p:sp>
       <p:sp>
         <p:nvSpPr>
@@ -10186,6 +10638,10 @@
             <a:prstDash val="solid"/>
           </a:ln>
         </p:spPr>
+        <p:txBody>
+          <a:bodyPr/>
+          <a:p/>
+        </p:txBody>
       </p:sp>
       <p:sp>
         <p:nvSpPr>
@@ -10208,6 +10664,10 @@
           </a:solidFill>
           <a:ln/>
         </p:spPr>
+        <p:txBody>
+          <a:bodyPr/>
+          <a:p/>
+        </p:txBody>
       </p:sp>
       <p:sp>
         <p:nvSpPr>
@@ -10274,6 +10734,10 @@
             <a:prstDash val="solid"/>
           </a:ln>
         </p:spPr>
+        <p:txBody>
+          <a:bodyPr/>
+          <a:p/>
+        </p:txBody>
       </p:sp>
       <p:sp>
         <p:nvSpPr>
@@ -10338,6 +10802,10 @@
             <a:prstDash val="solid"/>
           </a:ln>
         </p:spPr>
+        <p:txBody>
+          <a:bodyPr/>
+          <a:p/>
+        </p:txBody>
       </p:sp>
       <p:sp>
         <p:nvSpPr>
@@ -10427,6 +10895,10 @@
             <a:prstDash val="solid"/>
           </a:ln>
         </p:spPr>
+        <p:txBody>
+          <a:bodyPr/>
+          <a:p/>
+        </p:txBody>
       </p:sp>
       <p:sp>
         <p:nvSpPr>
@@ -10452,6 +10924,10 @@
             <a:prstDash val="solid"/>
           </a:ln>
         </p:spPr>
+        <p:txBody>
+          <a:bodyPr/>
+          <a:p/>
+        </p:txBody>
       </p:sp>
       <p:sp>
         <p:nvSpPr>
@@ -10477,6 +10953,10 @@
             <a:prstDash val="solid"/>
           </a:ln>
         </p:spPr>
+        <p:txBody>
+          <a:bodyPr/>
+          <a:p/>
+        </p:txBody>
       </p:sp>
       <p:sp>
         <p:nvSpPr>
@@ -10511,7 +10991,7 @@
                 <a:ea typeface="Arial Black" pitchFamily="34" charset="-122"/>
                 <a:cs typeface="Arial Black" pitchFamily="34" charset="-120"/>
               </a:rPr>
-              <a:t>紧固件行业 VSM 应用</a:t>
+              <a:t>制造业 VSM 应用</a:t>
             </a:r>
             <a:endParaRPr lang="en-US" sz="2800" dirty="0"/>
           </a:p>
@@ -10550,7 +11030,7 @@
                 <a:ea typeface="Arial" pitchFamily="34" charset="-122"/>
                 <a:cs typeface="Arial" pitchFamily="34" charset="-120"/>
               </a:rPr>
-              <a:t>VSM in Fastener Manufacturing</a:t>
+              <a:t>VSM in Discrete Manufacturing</a:t>
             </a:r>
             <a:endParaRPr lang="en-US" sz="1400" dirty="0"/>
           </a:p>
@@ -10589,7 +11069,7 @@
                 <a:ea typeface="Arial Black" pitchFamily="34" charset="-122"/>
                 <a:cs typeface="Arial Black" pitchFamily="34" charset="-120"/>
               </a:rPr>
-              <a:t>典型紧固件生产价值流</a:t>
+              <a:t>典型产品生产价值流</a:t>
             </a:r>
             <a:endParaRPr lang="en-US" sz="1600" dirty="0"/>
           </a:p>
@@ -10623,6 +11103,10 @@
             </a:outerShdw>
           </a:effectLst>
         </p:spPr>
+        <p:txBody>
+          <a:bodyPr/>
+          <a:p/>
+        </p:txBody>
       </p:sp>
       <p:sp>
         <p:nvSpPr>
@@ -10648,6 +11132,10 @@
             <a:prstDash val="solid"/>
           </a:ln>
         </p:spPr>
+        <p:txBody>
+          <a:bodyPr/>
+          <a:p/>
+        </p:txBody>
       </p:sp>
       <p:sp>
         <p:nvSpPr>
@@ -10682,7 +11170,7 @@
                 <a:ea typeface="Arial Black" pitchFamily="34" charset="-122"/>
                 <a:cs typeface="Arial Black" pitchFamily="34" charset="-120"/>
               </a:rPr>
-              <a:t>冷镦</a:t>
+              <a:t>机加工</a:t>
             </a:r>
             <a:endParaRPr lang="en-US" sz="1100" dirty="0"/>
           </a:p>
@@ -10721,7 +11209,7 @@
                 <a:ea typeface="Arial" pitchFamily="34" charset="-122"/>
                 <a:cs typeface="Arial" pitchFamily="34" charset="-120"/>
               </a:rPr>
-              <a:t>Cold Forging</a:t>
+              <a:t>Machining</a:t>
             </a:r>
             <a:endParaRPr lang="en-US" sz="700" dirty="0"/>
           </a:p>
@@ -10865,6 +11353,10 @@
           </a:solidFill>
           <a:ln/>
         </p:spPr>
+        <p:txBody>
+          <a:bodyPr/>
+          <a:p/>
+        </p:txBody>
       </p:sp>
       <p:sp>
         <p:nvSpPr>
@@ -10887,6 +11379,10 @@
           </a:solidFill>
           <a:ln/>
         </p:spPr>
+        <p:txBody>
+          <a:bodyPr/>
+          <a:p/>
+        </p:txBody>
       </p:sp>
       <p:sp>
         <p:nvSpPr>
@@ -10955,6 +11451,10 @@
             </a:outerShdw>
           </a:effectLst>
         </p:spPr>
+        <p:txBody>
+          <a:bodyPr/>
+          <a:p/>
+        </p:txBody>
       </p:sp>
       <p:sp>
         <p:nvSpPr>
@@ -10980,6 +11480,10 @@
             <a:prstDash val="solid"/>
           </a:ln>
         </p:spPr>
+        <p:txBody>
+          <a:bodyPr/>
+          <a:p/>
+        </p:txBody>
       </p:sp>
       <p:sp>
         <p:nvSpPr>
@@ -11014,7 +11518,7 @@
                 <a:ea typeface="Arial Black" pitchFamily="34" charset="-122"/>
                 <a:cs typeface="Arial Black" pitchFamily="34" charset="-120"/>
               </a:rPr>
-              <a:t>搓丝</a:t>
+              <a:t>精加工</a:t>
             </a:r>
             <a:endParaRPr lang="en-US" sz="1100" dirty="0"/>
           </a:p>
@@ -11053,7 +11557,7 @@
                 <a:ea typeface="Arial" pitchFamily="34" charset="-122"/>
                 <a:cs typeface="Arial" pitchFamily="34" charset="-120"/>
               </a:rPr>
-              <a:t>Thread Roll</a:t>
+              <a:t>Precision Machining</a:t>
             </a:r>
             <a:endParaRPr lang="en-US" sz="700" dirty="0"/>
           </a:p>
@@ -11197,6 +11701,10 @@
           </a:solidFill>
           <a:ln/>
         </p:spPr>
+        <p:txBody>
+          <a:bodyPr/>
+          <a:p/>
+        </p:txBody>
       </p:sp>
       <p:sp>
         <p:nvSpPr>
@@ -11219,6 +11727,10 @@
           </a:solidFill>
           <a:ln/>
         </p:spPr>
+        <p:txBody>
+          <a:bodyPr/>
+          <a:p/>
+        </p:txBody>
       </p:sp>
       <p:sp>
         <p:nvSpPr>
@@ -11287,6 +11799,10 @@
             </a:outerShdw>
           </a:effectLst>
         </p:spPr>
+        <p:txBody>
+          <a:bodyPr/>
+          <a:p/>
+        </p:txBody>
       </p:sp>
       <p:sp>
         <p:nvSpPr>
@@ -11312,6 +11828,10 @@
             <a:prstDash val="solid"/>
           </a:ln>
         </p:spPr>
+        <p:txBody>
+          <a:bodyPr/>
+          <a:p/>
+        </p:txBody>
       </p:sp>
       <p:sp>
         <p:nvSpPr>
@@ -11529,6 +12049,10 @@
           </a:solidFill>
           <a:ln/>
         </p:spPr>
+        <p:txBody>
+          <a:bodyPr/>
+          <a:p/>
+        </p:txBody>
       </p:sp>
       <p:sp>
         <p:nvSpPr>
@@ -11551,6 +12075,10 @@
           </a:solidFill>
           <a:ln/>
         </p:spPr>
+        <p:txBody>
+          <a:bodyPr/>
+          <a:p/>
+        </p:txBody>
       </p:sp>
       <p:sp>
         <p:nvSpPr>
@@ -11619,6 +12147,10 @@
             </a:outerShdw>
           </a:effectLst>
         </p:spPr>
+        <p:txBody>
+          <a:bodyPr/>
+          <a:p/>
+        </p:txBody>
       </p:sp>
       <p:sp>
         <p:nvSpPr>
@@ -11644,6 +12176,10 @@
             <a:prstDash val="solid"/>
           </a:ln>
         </p:spPr>
+        <p:txBody>
+          <a:bodyPr/>
+          <a:p/>
+        </p:txBody>
       </p:sp>
       <p:sp>
         <p:nvSpPr>
@@ -11861,6 +12397,10 @@
           </a:solidFill>
           <a:ln/>
         </p:spPr>
+        <p:txBody>
+          <a:bodyPr/>
+          <a:p/>
+        </p:txBody>
       </p:sp>
       <p:sp>
         <p:nvSpPr>
@@ -11883,6 +12423,10 @@
           </a:solidFill>
           <a:ln/>
         </p:spPr>
+        <p:txBody>
+          <a:bodyPr/>
+          <a:p/>
+        </p:txBody>
       </p:sp>
       <p:sp>
         <p:nvSpPr>
@@ -11951,6 +12495,10 @@
             </a:outerShdw>
           </a:effectLst>
         </p:spPr>
+        <p:txBody>
+          <a:bodyPr/>
+          <a:p/>
+        </p:txBody>
       </p:sp>
       <p:sp>
         <p:nvSpPr>
@@ -11976,6 +12524,10 @@
             <a:prstDash val="solid"/>
           </a:ln>
         </p:spPr>
+        <p:txBody>
+          <a:bodyPr/>
+          <a:p/>
+        </p:txBody>
       </p:sp>
       <p:sp>
         <p:nvSpPr>
@@ -12010,7 +12562,7 @@
                 <a:ea typeface="Arial Black" pitchFamily="34" charset="-122"/>
                 <a:cs typeface="Arial Black" pitchFamily="34" charset="-120"/>
               </a:rPr>
-              <a:t>分选</a:t>
+              <a:t>装配</a:t>
             </a:r>
             <a:endParaRPr lang="en-US" sz="1100" dirty="0"/>
           </a:p>
@@ -12193,6 +12745,10 @@
           </a:solidFill>
           <a:ln/>
         </p:spPr>
+        <p:txBody>
+          <a:bodyPr/>
+          <a:p/>
+        </p:txBody>
       </p:sp>
       <p:sp>
         <p:nvSpPr>
@@ -12215,6 +12771,10 @@
           </a:solidFill>
           <a:ln/>
         </p:spPr>
+        <p:txBody>
+          <a:bodyPr/>
+          <a:p/>
+        </p:txBody>
       </p:sp>
       <p:sp>
         <p:nvSpPr>
@@ -12283,6 +12843,10 @@
             </a:outerShdw>
           </a:effectLst>
         </p:spPr>
+        <p:txBody>
+          <a:bodyPr/>
+          <a:p/>
+        </p:txBody>
       </p:sp>
       <p:sp>
         <p:nvSpPr>
@@ -12308,6 +12872,10 @@
             <a:prstDash val="solid"/>
           </a:ln>
         </p:spPr>
+        <p:txBody>
+          <a:bodyPr/>
+          <a:p/>
+        </p:txBody>
       </p:sp>
       <p:sp>
         <p:nvSpPr>
@@ -12525,6 +13093,10 @@
           </a:solidFill>
           <a:ln/>
         </p:spPr>
+        <p:txBody>
+          <a:bodyPr/>
+          <a:p/>
+        </p:txBody>
       </p:sp>
       <p:sp>
         <p:nvSpPr>
@@ -12547,6 +13119,10 @@
           </a:solidFill>
           <a:ln/>
         </p:spPr>
+        <p:txBody>
+          <a:bodyPr/>
+          <a:p/>
+        </p:txBody>
       </p:sp>
       <p:sp>
         <p:nvSpPr>
@@ -12608,6 +13184,10 @@
           </a:solidFill>
           <a:ln/>
         </p:spPr>
+        <p:txBody>
+          <a:bodyPr/>
+          <a:p/>
+        </p:txBody>
       </p:sp>
       <p:sp>
         <p:nvSpPr>
@@ -12669,6 +13249,10 @@
           </a:solidFill>
           <a:ln/>
         </p:spPr>
+        <p:txBody>
+          <a:bodyPr/>
+          <a:p/>
+        </p:txBody>
       </p:sp>
       <p:sp>
         <p:nvSpPr>
@@ -12694,6 +13278,10 @@
             <a:prstDash val="solid"/>
           </a:ln>
         </p:spPr>
+        <p:txBody>
+          <a:bodyPr/>
+          <a:p/>
+        </p:txBody>
       </p:sp>
       <p:sp>
         <p:nvSpPr>
@@ -12794,6 +13382,10 @@
           </a:solidFill>
           <a:ln/>
         </p:spPr>
+        <p:txBody>
+          <a:bodyPr/>
+          <a:p/>
+        </p:txBody>
       </p:sp>
       <p:sp>
         <p:nvSpPr>
@@ -12819,6 +13411,10 @@
             <a:prstDash val="solid"/>
           </a:ln>
         </p:spPr>
+        <p:txBody>
+          <a:bodyPr/>
+          <a:p/>
+        </p:txBody>
       </p:sp>
       <p:sp>
         <p:nvSpPr>
@@ -12892,7 +13488,7 @@
                 <a:ea typeface="Arial" pitchFamily="34" charset="-122"/>
                 <a:cs typeface="Arial" pitchFamily="34" charset="-120"/>
               </a:rPr>
-              <a:t>冷镦换型&gt;60min，实施SMED可降至&lt;10min</a:t>
+              <a:t>机加工换型&gt;60min，实施SMED可降至&lt;10min</a:t>
             </a:r>
             <a:endParaRPr lang="en-US" sz="800" dirty="0"/>
           </a:p>
@@ -12919,6 +13515,10 @@
           </a:solidFill>
           <a:ln/>
         </p:spPr>
+        <p:txBody>
+          <a:bodyPr/>
+          <a:p/>
+        </p:txBody>
       </p:sp>
       <p:sp>
         <p:nvSpPr>
@@ -12944,6 +13544,10 @@
             <a:prstDash val="solid"/>
           </a:ln>
         </p:spPr>
+        <p:txBody>
+          <a:bodyPr/>
+          <a:p/>
+        </p:txBody>
       </p:sp>
       <p:sp>
         <p:nvSpPr>
@@ -13044,6 +13648,10 @@
           </a:solidFill>
           <a:ln/>
         </p:spPr>
+        <p:txBody>
+          <a:bodyPr/>
+          <a:p/>
+        </p:txBody>
       </p:sp>
       <p:sp>
         <p:nvSpPr>
@@ -13069,6 +13677,10 @@
             <a:prstDash val="solid"/>
           </a:ln>
         </p:spPr>
+        <p:txBody>
+          <a:bodyPr/>
+          <a:p/>
+        </p:txBody>
       </p:sp>
       <p:sp>
         <p:nvSpPr>
@@ -13172,6 +13784,10 @@
             <a:prstDash val="solid"/>
           </a:ln>
         </p:spPr>
+        <p:txBody>
+          <a:bodyPr/>
+          <a:p/>
+        </p:txBody>
       </p:sp>
       <p:sp>
         <p:nvSpPr>
@@ -13206,7 +13822,7 @@
                 <a:ea typeface="Arial" pitchFamily="34" charset="-122"/>
                 <a:cs typeface="Arial" pitchFamily="34" charset="-120"/>
               </a:rPr>
-              <a:t>紧固件行业VSM核心：减少热处理瓶颈和换型时间 | 建立拉动式生产体系</a:t>
+              <a:t>制造业VSM核心：减少热处理瓶颈和换型时间 | 建立拉动式生产体系</a:t>
             </a:r>
             <a:endParaRPr lang="en-US" sz="1100" dirty="0"/>
           </a:p>
@@ -13261,6 +13877,10 @@
             <a:prstDash val="solid"/>
           </a:ln>
         </p:spPr>
+        <p:txBody>
+          <a:bodyPr/>
+          <a:p/>
+        </p:txBody>
       </p:sp>
       <p:sp>
         <p:nvSpPr>
@@ -13286,6 +13906,10 @@
             <a:prstDash val="solid"/>
           </a:ln>
         </p:spPr>
+        <p:txBody>
+          <a:bodyPr/>
+          <a:p/>
+        </p:txBody>
       </p:sp>
       <p:sp>
         <p:nvSpPr>
@@ -13311,6 +13935,10 @@
             <a:prstDash val="solid"/>
           </a:ln>
         </p:spPr>
+        <p:txBody>
+          <a:bodyPr/>
+          <a:p/>
+        </p:txBody>
       </p:sp>
       <p:sp>
         <p:nvSpPr>
@@ -13448,6 +14076,10 @@
           </a:solidFill>
           <a:ln/>
         </p:spPr>
+        <p:txBody>
+          <a:bodyPr/>
+          <a:p/>
+        </p:txBody>
       </p:sp>
       <p:sp>
         <p:nvSpPr>
@@ -13507,6 +14139,10 @@
           </a:solidFill>
           <a:ln/>
         </p:spPr>
+        <p:txBody>
+          <a:bodyPr/>
+          <a:p/>
+        </p:txBody>
       </p:sp>
       <p:sp>
         <p:nvSpPr>
@@ -13566,6 +14202,10 @@
           </a:solidFill>
           <a:ln/>
         </p:spPr>
+        <p:txBody>
+          <a:bodyPr/>
+          <a:p/>
+        </p:txBody>
       </p:sp>
       <p:sp>
         <p:nvSpPr>
@@ -13625,6 +14265,10 @@
           </a:solidFill>
           <a:ln/>
         </p:spPr>
+        <p:txBody>
+          <a:bodyPr/>
+          <a:p/>
+        </p:txBody>
       </p:sp>
       <p:sp>
         <p:nvSpPr>
@@ -13684,6 +14328,10 @@
           </a:solidFill>
           <a:ln/>
         </p:spPr>
+        <p:txBody>
+          <a:bodyPr/>
+          <a:p/>
+        </p:txBody>
       </p:sp>
       <p:sp>
         <p:nvSpPr>
@@ -13743,6 +14391,10 @@
           </a:solidFill>
           <a:ln/>
         </p:spPr>
+        <p:txBody>
+          <a:bodyPr/>
+          <a:p/>
+        </p:txBody>
       </p:sp>
       <p:sp>
         <p:nvSpPr>
@@ -13802,6 +14454,10 @@
           </a:solidFill>
           <a:ln/>
         </p:spPr>
+        <p:txBody>
+          <a:bodyPr/>
+          <a:p/>
+        </p:txBody>
       </p:sp>
       <p:sp>
         <p:nvSpPr>
@@ -13861,6 +14517,10 @@
           </a:solidFill>
           <a:ln/>
         </p:spPr>
+        <p:txBody>
+          <a:bodyPr/>
+          <a:p/>
+        </p:txBody>
       </p:sp>
       <p:sp>
         <p:nvSpPr>
@@ -13920,6 +14580,10 @@
           </a:solidFill>
           <a:ln/>
         </p:spPr>
+        <p:txBody>
+          <a:bodyPr/>
+          <a:p/>
+        </p:txBody>
       </p:sp>
       <p:sp>
         <p:nvSpPr>
@@ -13979,6 +14643,10 @@
           </a:solidFill>
           <a:ln/>
         </p:spPr>
+        <p:txBody>
+          <a:bodyPr/>
+          <a:p/>
+        </p:txBody>
       </p:sp>
       <p:sp>
         <p:nvSpPr>
@@ -14038,6 +14706,10 @@
           </a:solidFill>
           <a:ln/>
         </p:spPr>
+        <p:txBody>
+          <a:bodyPr/>
+          <a:p/>
+        </p:txBody>
       </p:sp>
       <p:sp>
         <p:nvSpPr>
@@ -14097,6 +14769,10 @@
           </a:solidFill>
           <a:ln/>
         </p:spPr>
+        <p:txBody>
+          <a:bodyPr/>
+          <a:p/>
+        </p:txBody>
       </p:sp>
       <p:sp>
         <p:nvSpPr>
@@ -14156,6 +14832,10 @@
           </a:solidFill>
           <a:ln/>
         </p:spPr>
+        <p:txBody>
+          <a:bodyPr/>
+          <a:p/>
+        </p:txBody>
       </p:sp>
       <p:sp>
         <p:nvSpPr>
@@ -14215,6 +14895,10 @@
           </a:solidFill>
           <a:ln/>
         </p:spPr>
+        <p:txBody>
+          <a:bodyPr/>
+          <a:p/>
+        </p:txBody>
       </p:sp>
       <p:sp>
         <p:nvSpPr>
@@ -14274,6 +14958,10 @@
           </a:solidFill>
           <a:ln/>
         </p:spPr>
+        <p:txBody>
+          <a:bodyPr/>
+          <a:p/>
+        </p:txBody>
       </p:sp>
       <p:sp>
         <p:nvSpPr>
@@ -14333,6 +15021,10 @@
           </a:solidFill>
           <a:ln/>
         </p:spPr>
+        <p:txBody>
+          <a:bodyPr/>
+          <a:p/>
+        </p:txBody>
       </p:sp>
       <p:sp>
         <p:nvSpPr>
@@ -14392,6 +15084,10 @@
           </a:solidFill>
           <a:ln/>
         </p:spPr>
+        <p:txBody>
+          <a:bodyPr/>
+          <a:p/>
+        </p:txBody>
       </p:sp>
       <p:sp>
         <p:nvSpPr>
@@ -14451,6 +15147,10 @@
           </a:solidFill>
           <a:ln/>
         </p:spPr>
+        <p:txBody>
+          <a:bodyPr/>
+          <a:p/>
+        </p:txBody>
       </p:sp>
       <p:sp>
         <p:nvSpPr>
@@ -14510,6 +15210,10 @@
           </a:solidFill>
           <a:ln/>
         </p:spPr>
+        <p:txBody>
+          <a:bodyPr/>
+          <a:p/>
+        </p:txBody>
       </p:sp>
       <p:sp>
         <p:nvSpPr>
@@ -14569,6 +15273,10 @@
           </a:solidFill>
           <a:ln/>
         </p:spPr>
+        <p:txBody>
+          <a:bodyPr/>
+          <a:p/>
+        </p:txBody>
       </p:sp>
       <p:sp>
         <p:nvSpPr>
@@ -14628,6 +15336,10 @@
           </a:solidFill>
           <a:ln/>
         </p:spPr>
+        <p:txBody>
+          <a:bodyPr/>
+          <a:p/>
+        </p:txBody>
       </p:sp>
       <p:sp>
         <p:nvSpPr>
@@ -14687,6 +15399,10 @@
           </a:solidFill>
           <a:ln/>
         </p:spPr>
+        <p:txBody>
+          <a:bodyPr/>
+          <a:p/>
+        </p:txBody>
       </p:sp>
       <p:sp>
         <p:nvSpPr>
@@ -14746,6 +15462,10 @@
           </a:solidFill>
           <a:ln/>
         </p:spPr>
+        <p:txBody>
+          <a:bodyPr/>
+          <a:p/>
+        </p:txBody>
       </p:sp>
       <p:sp>
         <p:nvSpPr>
@@ -14805,6 +15525,10 @@
           </a:solidFill>
           <a:ln/>
         </p:spPr>
+        <p:txBody>
+          <a:bodyPr/>
+          <a:p/>
+        </p:txBody>
       </p:sp>
       <p:sp>
         <p:nvSpPr>
@@ -14864,6 +15588,10 @@
           </a:solidFill>
           <a:ln/>
         </p:spPr>
+        <p:txBody>
+          <a:bodyPr/>
+          <a:p/>
+        </p:txBody>
       </p:sp>
       <p:sp>
         <p:nvSpPr>
@@ -14923,6 +15651,10 @@
           </a:solidFill>
           <a:ln/>
         </p:spPr>
+        <p:txBody>
+          <a:bodyPr/>
+          <a:p/>
+        </p:txBody>
       </p:sp>
       <p:sp>
         <p:nvSpPr>
@@ -14982,6 +15714,10 @@
           </a:solidFill>
           <a:ln/>
         </p:spPr>
+        <p:txBody>
+          <a:bodyPr/>
+          <a:p/>
+        </p:txBody>
       </p:sp>
       <p:sp>
         <p:nvSpPr>
@@ -15041,6 +15777,10 @@
           </a:solidFill>
           <a:ln/>
         </p:spPr>
+        <p:txBody>
+          <a:bodyPr/>
+          <a:p/>
+        </p:txBody>
       </p:sp>
       <p:sp>
         <p:nvSpPr>
@@ -15100,6 +15840,10 @@
           </a:solidFill>
           <a:ln/>
         </p:spPr>
+        <p:txBody>
+          <a:bodyPr/>
+          <a:p/>
+        </p:txBody>
       </p:sp>
       <p:sp>
         <p:nvSpPr>
@@ -15159,6 +15903,10 @@
           </a:solidFill>
           <a:ln/>
         </p:spPr>
+        <p:txBody>
+          <a:bodyPr/>
+          <a:p/>
+        </p:txBody>
       </p:sp>
       <p:sp>
         <p:nvSpPr>
@@ -15218,6 +15966,10 @@
           </a:solidFill>
           <a:ln/>
         </p:spPr>
+        <p:txBody>
+          <a:bodyPr/>
+          <a:p/>
+        </p:txBody>
       </p:sp>
       <p:sp>
         <p:nvSpPr>
@@ -15277,6 +16029,10 @@
           </a:solidFill>
           <a:ln/>
         </p:spPr>
+        <p:txBody>
+          <a:bodyPr/>
+          <a:p/>
+        </p:txBody>
       </p:sp>
       <p:sp>
         <p:nvSpPr>
@@ -15336,6 +16092,10 @@
           </a:solidFill>
           <a:ln/>
         </p:spPr>
+        <p:txBody>
+          <a:bodyPr/>
+          <a:p/>
+        </p:txBody>
       </p:sp>
       <p:sp>
         <p:nvSpPr>
@@ -15395,6 +16155,10 @@
           </a:solidFill>
           <a:ln/>
         </p:spPr>
+        <p:txBody>
+          <a:bodyPr/>
+          <a:p/>
+        </p:txBody>
       </p:sp>
       <p:sp>
         <p:nvSpPr>
@@ -15454,6 +16218,10 @@
           </a:solidFill>
           <a:ln/>
         </p:spPr>
+        <p:txBody>
+          <a:bodyPr/>
+          <a:p/>
+        </p:txBody>
       </p:sp>
       <p:sp>
         <p:nvSpPr>
@@ -15513,6 +16281,10 @@
           </a:solidFill>
           <a:ln/>
         </p:spPr>
+        <p:txBody>
+          <a:bodyPr/>
+          <a:p/>
+        </p:txBody>
       </p:sp>
       <p:sp>
         <p:nvSpPr>
@@ -15572,6 +16344,10 @@
           </a:solidFill>
           <a:ln/>
         </p:spPr>
+        <p:txBody>
+          <a:bodyPr/>
+          <a:p/>
+        </p:txBody>
       </p:sp>
       <p:sp>
         <p:nvSpPr>
@@ -15631,6 +16407,10 @@
           </a:solidFill>
           <a:ln/>
         </p:spPr>
+        <p:txBody>
+          <a:bodyPr/>
+          <a:p/>
+        </p:txBody>
       </p:sp>
       <p:sp>
         <p:nvSpPr>
@@ -15690,6 +16470,10 @@
           </a:solidFill>
           <a:ln/>
         </p:spPr>
+        <p:txBody>
+          <a:bodyPr/>
+          <a:p/>
+        </p:txBody>
       </p:sp>
       <p:sp>
         <p:nvSpPr>
@@ -15749,6 +16533,10 @@
           </a:solidFill>
           <a:ln/>
         </p:spPr>
+        <p:txBody>
+          <a:bodyPr/>
+          <a:p/>
+        </p:txBody>
       </p:sp>
       <p:sp>
         <p:nvSpPr>
@@ -15808,6 +16596,10 @@
           </a:solidFill>
           <a:ln/>
         </p:spPr>
+        <p:txBody>
+          <a:bodyPr/>
+          <a:p/>
+        </p:txBody>
       </p:sp>
       <p:sp>
         <p:nvSpPr>
@@ -15867,6 +16659,10 @@
           </a:solidFill>
           <a:ln/>
         </p:spPr>
+        <p:txBody>
+          <a:bodyPr/>
+          <a:p/>
+        </p:txBody>
       </p:sp>
       <p:sp>
         <p:nvSpPr>
@@ -15926,6 +16722,10 @@
           </a:solidFill>
           <a:ln/>
         </p:spPr>
+        <p:txBody>
+          <a:bodyPr/>
+          <a:p/>
+        </p:txBody>
       </p:sp>
       <p:sp>
         <p:nvSpPr>
@@ -15985,6 +16785,10 @@
           </a:solidFill>
           <a:ln/>
         </p:spPr>
+        <p:txBody>
+          <a:bodyPr/>
+          <a:p/>
+        </p:txBody>
       </p:sp>
       <p:sp>
         <p:nvSpPr>
@@ -16044,6 +16848,10 @@
           </a:solidFill>
           <a:ln/>
         </p:spPr>
+        <p:txBody>
+          <a:bodyPr/>
+          <a:p/>
+        </p:txBody>
       </p:sp>
       <p:sp>
         <p:nvSpPr>
@@ -16103,6 +16911,10 @@
           </a:solidFill>
           <a:ln/>
         </p:spPr>
+        <p:txBody>
+          <a:bodyPr/>
+          <a:p/>
+        </p:txBody>
       </p:sp>
       <p:sp>
         <p:nvSpPr>
@@ -16162,6 +16974,10 @@
           </a:solidFill>
           <a:ln/>
         </p:spPr>
+        <p:txBody>
+          <a:bodyPr/>
+          <a:p/>
+        </p:txBody>
       </p:sp>
       <p:sp>
         <p:nvSpPr>
@@ -16221,6 +17037,10 @@
           </a:solidFill>
           <a:ln/>
         </p:spPr>
+        <p:txBody>
+          <a:bodyPr/>
+          <a:p/>
+        </p:txBody>
       </p:sp>
       <p:sp>
         <p:nvSpPr>
@@ -16280,6 +17100,10 @@
           </a:solidFill>
           <a:ln/>
         </p:spPr>
+        <p:txBody>
+          <a:bodyPr/>
+          <a:p/>
+        </p:txBody>
       </p:sp>
       <p:sp>
         <p:nvSpPr>
@@ -16339,6 +17163,10 @@
           </a:solidFill>
           <a:ln/>
         </p:spPr>
+        <p:txBody>
+          <a:bodyPr/>
+          <a:p/>
+        </p:txBody>
       </p:sp>
       <p:sp>
         <p:nvSpPr>
@@ -16398,6 +17226,10 @@
           </a:solidFill>
           <a:ln/>
         </p:spPr>
+        <p:txBody>
+          <a:bodyPr/>
+          <a:p/>
+        </p:txBody>
       </p:sp>
       <p:sp>
         <p:nvSpPr>
@@ -16457,6 +17289,10 @@
           </a:solidFill>
           <a:ln/>
         </p:spPr>
+        <p:txBody>
+          <a:bodyPr/>
+          <a:p/>
+        </p:txBody>
       </p:sp>
       <p:sp>
         <p:nvSpPr>
@@ -16516,6 +17352,10 @@
           </a:solidFill>
           <a:ln/>
         </p:spPr>
+        <p:txBody>
+          <a:bodyPr/>
+          <a:p/>
+        </p:txBody>
       </p:sp>
       <p:sp>
         <p:nvSpPr>
@@ -16575,6 +17415,10 @@
           </a:solidFill>
           <a:ln/>
         </p:spPr>
+        <p:txBody>
+          <a:bodyPr/>
+          <a:p/>
+        </p:txBody>
       </p:sp>
       <p:sp>
         <p:nvSpPr>
@@ -16634,6 +17478,10 @@
           </a:solidFill>
           <a:ln/>
         </p:spPr>
+        <p:txBody>
+          <a:bodyPr/>
+          <a:p/>
+        </p:txBody>
       </p:sp>
       <p:sp>
         <p:nvSpPr>
@@ -16693,6 +17541,10 @@
           </a:solidFill>
           <a:ln/>
         </p:spPr>
+        <p:txBody>
+          <a:bodyPr/>
+          <a:p/>
+        </p:txBody>
       </p:sp>
       <p:sp>
         <p:nvSpPr>
@@ -16754,6 +17606,10 @@
           </a:solidFill>
           <a:ln/>
         </p:spPr>
+        <p:txBody>
+          <a:bodyPr/>
+          <a:p/>
+        </p:txBody>
       </p:sp>
       <p:sp>
         <p:nvSpPr>
@@ -16818,6 +17674,10 @@
             <a:prstDash val="solid"/>
           </a:ln>
         </p:spPr>
+        <p:txBody>
+          <a:bodyPr/>
+          <a:p/>
+        </p:txBody>
       </p:sp>
       <p:sp>
         <p:nvSpPr>
